--- a/projekt.pptx
+++ b/projekt.pptx
@@ -2,14 +2,14 @@
 <file path=ppt/presentation.xml><?xml version="1.0" encoding="utf-8"?>
 <p:presentation xmlns:a="http://schemas.openxmlformats.org/drawingml/2006/main" xmlns:r="http://schemas.openxmlformats.org/officeDocument/2006/relationships" xmlns:p="http://schemas.openxmlformats.org/presentationml/2006/main" saveSubsetFonts="1">
   <p:sldMasterIdLst>
-    <p:sldMasterId id="2147483660" r:id="rId1"/>
+    <p:sldMasterId id="2147483675" r:id="rId1"/>
   </p:sldMasterIdLst>
   <p:sldIdLst>
     <p:sldId id="256" r:id="rId2"/>
     <p:sldId id="257" r:id="rId3"/>
-    <p:sldId id="260" r:id="rId4"/>
-    <p:sldId id="258" r:id="rId5"/>
-    <p:sldId id="259" r:id="rId6"/>
+    <p:sldId id="258" r:id="rId4"/>
+    <p:sldId id="259" r:id="rId5"/>
+    <p:sldId id="261" r:id="rId6"/>
   </p:sldIdLst>
   <p:sldSz cx="12192000" cy="6858000"/>
   <p:notesSz cx="6858000" cy="9144000"/>
@@ -108,6 +108,11 @@
       </a:defRPr>
     </a:lvl9pPr>
   </p:defaultTextStyle>
+  <p:extLst>
+    <p:ext uri="{EFAFB233-063F-42B5-8137-9DF3F51BA10A}">
+      <p15:sldGuideLst xmlns:p15="http://schemas.microsoft.com/office/powerpoint/2012/main"/>
+    </p:ext>
+  </p:extLst>
 </p:presentation>
 </file>
 
@@ -398,7 +403,7 @@
           <a:p>
             <a:fld id="{CAF956B7-7A55-4C45-85D9-231421E1CCA8}" type="datetimeFigureOut">
               <a:rPr lang="hu-HU" smtClean="0"/>
-              <a:t>2026. 09. 11.</a:t>
+              <a:t>2026. 09. 15.</a:t>
             </a:fld>
             <a:endParaRPr lang="hu-HU"/>
           </a:p>
@@ -449,7 +454,7 @@
     </p:spTree>
     <p:extLst>
       <p:ext uri="{BB962C8B-B14F-4D97-AF65-F5344CB8AC3E}">
-        <p14:creationId xmlns:p14="http://schemas.microsoft.com/office/powerpoint/2010/main" val="575436671"/>
+        <p14:creationId xmlns:p14="http://schemas.microsoft.com/office/powerpoint/2010/main" val="1488032988"/>
       </p:ext>
     </p:extLst>
   </p:cSld>
@@ -716,7 +721,7 @@
           <a:p>
             <a:fld id="{CAF956B7-7A55-4C45-85D9-231421E1CCA8}" type="datetimeFigureOut">
               <a:rPr lang="hu-HU" smtClean="0"/>
-              <a:t>2026. 09. 11.</a:t>
+              <a:t>2026. 09. 15.</a:t>
             </a:fld>
             <a:endParaRPr lang="hu-HU"/>
           </a:p>
@@ -767,7 +772,7 @@
     </p:spTree>
     <p:extLst>
       <p:ext uri="{BB962C8B-B14F-4D97-AF65-F5344CB8AC3E}">
-        <p14:creationId xmlns:p14="http://schemas.microsoft.com/office/powerpoint/2010/main" val="2726387766"/>
+        <p14:creationId xmlns:p14="http://schemas.microsoft.com/office/powerpoint/2010/main" val="1357667188"/>
       </p:ext>
     </p:extLst>
   </p:cSld>
@@ -1204,7 +1209,7 @@
           <a:p>
             <a:fld id="{CAF956B7-7A55-4C45-85D9-231421E1CCA8}" type="datetimeFigureOut">
               <a:rPr lang="hu-HU" smtClean="0"/>
-              <a:t>2026. 09. 11.</a:t>
+              <a:t>2026. 09. 15.</a:t>
             </a:fld>
             <a:endParaRPr lang="hu-HU"/>
           </a:p>
@@ -1255,7 +1260,7 @@
     </p:spTree>
     <p:extLst>
       <p:ext uri="{BB962C8B-B14F-4D97-AF65-F5344CB8AC3E}">
-        <p14:creationId xmlns:p14="http://schemas.microsoft.com/office/powerpoint/2010/main" val="1426329214"/>
+        <p14:creationId xmlns:p14="http://schemas.microsoft.com/office/powerpoint/2010/main" val="4047803339"/>
       </p:ext>
     </p:extLst>
   </p:cSld>
@@ -1573,7 +1578,7 @@
           <a:p>
             <a:fld id="{CAF956B7-7A55-4C45-85D9-231421E1CCA8}" type="datetimeFigureOut">
               <a:rPr lang="hu-HU" smtClean="0"/>
-              <a:t>2026. 09. 11.</a:t>
+              <a:t>2026. 09. 15.</a:t>
             </a:fld>
             <a:endParaRPr lang="hu-HU"/>
           </a:p>
@@ -1624,7 +1629,7 @@
     </p:spTree>
     <p:extLst>
       <p:ext uri="{BB962C8B-B14F-4D97-AF65-F5344CB8AC3E}">
-        <p14:creationId xmlns:p14="http://schemas.microsoft.com/office/powerpoint/2010/main" val="3799025299"/>
+        <p14:creationId xmlns:p14="http://schemas.microsoft.com/office/powerpoint/2010/main" val="2901881024"/>
       </p:ext>
     </p:extLst>
   </p:cSld>
@@ -1846,7 +1851,7 @@
           <a:p>
             <a:fld id="{CAF956B7-7A55-4C45-85D9-231421E1CCA8}" type="datetimeFigureOut">
               <a:rPr lang="hu-HU" smtClean="0"/>
-              <a:t>2026. 09. 11.</a:t>
+              <a:t>2026. 09. 15.</a:t>
             </a:fld>
             <a:endParaRPr lang="hu-HU"/>
           </a:p>
@@ -1897,7 +1902,7 @@
     </p:spTree>
     <p:extLst>
       <p:ext uri="{BB962C8B-B14F-4D97-AF65-F5344CB8AC3E}">
-        <p14:creationId xmlns:p14="http://schemas.microsoft.com/office/powerpoint/2010/main" val="3359294904"/>
+        <p14:creationId xmlns:p14="http://schemas.microsoft.com/office/powerpoint/2010/main" val="3165767468"/>
       </p:ext>
     </p:extLst>
   </p:cSld>
@@ -2131,7 +2136,7 @@
           <a:p>
             <a:fld id="{CAF956B7-7A55-4C45-85D9-231421E1CCA8}" type="datetimeFigureOut">
               <a:rPr lang="hu-HU" smtClean="0"/>
-              <a:t>2026. 09. 11.</a:t>
+              <a:t>2026. 09. 15.</a:t>
             </a:fld>
             <a:endParaRPr lang="hu-HU"/>
           </a:p>
@@ -2182,7 +2187,7 @@
     </p:spTree>
     <p:extLst>
       <p:ext uri="{BB962C8B-B14F-4D97-AF65-F5344CB8AC3E}">
-        <p14:creationId xmlns:p14="http://schemas.microsoft.com/office/powerpoint/2010/main" val="1344495086"/>
+        <p14:creationId xmlns:p14="http://schemas.microsoft.com/office/powerpoint/2010/main" val="819275932"/>
       </p:ext>
     </p:extLst>
   </p:cSld>
@@ -2414,7 +2419,7 @@
           <a:p>
             <a:fld id="{CAF956B7-7A55-4C45-85D9-231421E1CCA8}" type="datetimeFigureOut">
               <a:rPr lang="hu-HU" smtClean="0"/>
-              <a:t>2026. 09. 11.</a:t>
+              <a:t>2026. 09. 15.</a:t>
             </a:fld>
             <a:endParaRPr lang="hu-HU"/>
           </a:p>
@@ -2465,7 +2470,7 @@
     </p:spTree>
     <p:extLst>
       <p:ext uri="{BB962C8B-B14F-4D97-AF65-F5344CB8AC3E}">
-        <p14:creationId xmlns:p14="http://schemas.microsoft.com/office/powerpoint/2010/main" val="1581211058"/>
+        <p14:creationId xmlns:p14="http://schemas.microsoft.com/office/powerpoint/2010/main" val="2832922498"/>
       </p:ext>
     </p:extLst>
   </p:cSld>
@@ -2757,7 +2762,7 @@
           <a:p>
             <a:fld id="{CAF956B7-7A55-4C45-85D9-231421E1CCA8}" type="datetimeFigureOut">
               <a:rPr lang="hu-HU" smtClean="0"/>
-              <a:t>2026. 09. 11.</a:t>
+              <a:t>2026. 09. 15.</a:t>
             </a:fld>
             <a:endParaRPr lang="hu-HU"/>
           </a:p>
@@ -2808,7 +2813,7 @@
     </p:spTree>
     <p:extLst>
       <p:ext uri="{BB962C8B-B14F-4D97-AF65-F5344CB8AC3E}">
-        <p14:creationId xmlns:p14="http://schemas.microsoft.com/office/powerpoint/2010/main" val="1304954621"/>
+        <p14:creationId xmlns:p14="http://schemas.microsoft.com/office/powerpoint/2010/main" val="2781886858"/>
       </p:ext>
     </p:extLst>
   </p:cSld>
@@ -3096,7 +3101,7 @@
           <a:p>
             <a:fld id="{CAF956B7-7A55-4C45-85D9-231421E1CCA8}" type="datetimeFigureOut">
               <a:rPr lang="hu-HU" smtClean="0"/>
-              <a:t>2026. 09. 11.</a:t>
+              <a:t>2026. 09. 15.</a:t>
             </a:fld>
             <a:endParaRPr lang="hu-HU"/>
           </a:p>
@@ -3147,7 +3152,7 @@
     </p:spTree>
     <p:extLst>
       <p:ext uri="{BB962C8B-B14F-4D97-AF65-F5344CB8AC3E}">
-        <p14:creationId xmlns:p14="http://schemas.microsoft.com/office/powerpoint/2010/main" val="2969590594"/>
+        <p14:creationId xmlns:p14="http://schemas.microsoft.com/office/powerpoint/2010/main" val="2627375947"/>
       </p:ext>
     </p:extLst>
   </p:cSld>
@@ -3573,7 +3578,7 @@
           <a:p>
             <a:fld id="{CAF956B7-7A55-4C45-85D9-231421E1CCA8}" type="datetimeFigureOut">
               <a:rPr lang="hu-HU" smtClean="0"/>
-              <a:t>2026. 09. 11.</a:t>
+              <a:t>2026. 09. 15.</a:t>
             </a:fld>
             <a:endParaRPr lang="hu-HU"/>
           </a:p>
@@ -3624,7 +3629,7 @@
     </p:spTree>
     <p:extLst>
       <p:ext uri="{BB962C8B-B14F-4D97-AF65-F5344CB8AC3E}">
-        <p14:creationId xmlns:p14="http://schemas.microsoft.com/office/powerpoint/2010/main" val="3472364390"/>
+        <p14:creationId xmlns:p14="http://schemas.microsoft.com/office/powerpoint/2010/main" val="2242637134"/>
       </p:ext>
     </p:extLst>
   </p:cSld>
@@ -3794,7 +3799,7 @@
           <a:p>
             <a:fld id="{CAF956B7-7A55-4C45-85D9-231421E1CCA8}" type="datetimeFigureOut">
               <a:rPr lang="hu-HU" smtClean="0"/>
-              <a:t>2026. 09. 11.</a:t>
+              <a:t>2026. 09. 15.</a:t>
             </a:fld>
             <a:endParaRPr lang="hu-HU"/>
           </a:p>
@@ -3845,7 +3850,7 @@
     </p:spTree>
     <p:extLst>
       <p:ext uri="{BB962C8B-B14F-4D97-AF65-F5344CB8AC3E}">
-        <p14:creationId xmlns:p14="http://schemas.microsoft.com/office/powerpoint/2010/main" val="1526018810"/>
+        <p14:creationId xmlns:p14="http://schemas.microsoft.com/office/powerpoint/2010/main" val="71086967"/>
       </p:ext>
     </p:extLst>
   </p:cSld>
@@ -3889,7 +3894,7 @@
           <a:p>
             <a:fld id="{CAF956B7-7A55-4C45-85D9-231421E1CCA8}" type="datetimeFigureOut">
               <a:rPr lang="hu-HU" smtClean="0"/>
-              <a:t>2026. 09. 11.</a:t>
+              <a:t>2026. 09. 15.</a:t>
             </a:fld>
             <a:endParaRPr lang="hu-HU"/>
           </a:p>
@@ -3940,7 +3945,7 @@
     </p:spTree>
     <p:extLst>
       <p:ext uri="{BB962C8B-B14F-4D97-AF65-F5344CB8AC3E}">
-        <p14:creationId xmlns:p14="http://schemas.microsoft.com/office/powerpoint/2010/main" val="398789412"/>
+        <p14:creationId xmlns:p14="http://schemas.microsoft.com/office/powerpoint/2010/main" val="2240390078"/>
       </p:ext>
     </p:extLst>
   </p:cSld>
@@ -4356,7 +4361,7 @@
           <a:p>
             <a:fld id="{CAF956B7-7A55-4C45-85D9-231421E1CCA8}" type="datetimeFigureOut">
               <a:rPr lang="hu-HU" smtClean="0"/>
-              <a:t>2026. 09. 11.</a:t>
+              <a:t>2026. 09. 15.</a:t>
             </a:fld>
             <a:endParaRPr lang="hu-HU"/>
           </a:p>
@@ -4407,7 +4412,7 @@
     </p:spTree>
     <p:extLst>
       <p:ext uri="{BB962C8B-B14F-4D97-AF65-F5344CB8AC3E}">
-        <p14:creationId xmlns:p14="http://schemas.microsoft.com/office/powerpoint/2010/main" val="2471133457"/>
+        <p14:creationId xmlns:p14="http://schemas.microsoft.com/office/powerpoint/2010/main" val="229252007"/>
       </p:ext>
     </p:extLst>
   </p:cSld>
@@ -4669,7 +4674,7 @@
           <a:p>
             <a:fld id="{CAF956B7-7A55-4C45-85D9-231421E1CCA8}" type="datetimeFigureOut">
               <a:rPr lang="hu-HU" smtClean="0"/>
-              <a:t>2026. 09. 11.</a:t>
+              <a:t>2026. 09. 15.</a:t>
             </a:fld>
             <a:endParaRPr lang="hu-HU"/>
           </a:p>
@@ -4730,7 +4735,7 @@
     </p:spTree>
     <p:extLst>
       <p:ext uri="{BB962C8B-B14F-4D97-AF65-F5344CB8AC3E}">
-        <p14:creationId xmlns:p14="http://schemas.microsoft.com/office/powerpoint/2010/main" val="1884465747"/>
+        <p14:creationId xmlns:p14="http://schemas.microsoft.com/office/powerpoint/2010/main" val="355031658"/>
       </p:ext>
     </p:extLst>
   </p:cSld>
@@ -4939,7 +4944,7 @@
           <a:p>
             <a:fld id="{CAF956B7-7A55-4C45-85D9-231421E1CCA8}" type="datetimeFigureOut">
               <a:rPr lang="hu-HU" smtClean="0"/>
-              <a:t>2026. 09. 11.</a:t>
+              <a:t>2026. 09. 15.</a:t>
             </a:fld>
             <a:endParaRPr lang="hu-HU"/>
           </a:p>
@@ -4987,26 +4992,26 @@
     </p:spTree>
     <p:extLst>
       <p:ext uri="{BB962C8B-B14F-4D97-AF65-F5344CB8AC3E}">
-        <p14:creationId xmlns:p14="http://schemas.microsoft.com/office/powerpoint/2010/main" val="1561958583"/>
+        <p14:creationId xmlns:p14="http://schemas.microsoft.com/office/powerpoint/2010/main" val="1297858213"/>
       </p:ext>
     </p:extLst>
   </p:cSld>
   <p:clrMap bg1="dk1" tx1="lt1" bg2="dk2" tx2="lt2" accent1="accent1" accent2="accent2" accent3="accent3" accent4="accent4" accent5="accent5" accent6="accent6" hlink="hlink" folHlink="folHlink"/>
   <p:sldLayoutIdLst>
-    <p:sldLayoutId id="2147483661" r:id="rId1"/>
-    <p:sldLayoutId id="2147483662" r:id="rId2"/>
-    <p:sldLayoutId id="2147483663" r:id="rId3"/>
-    <p:sldLayoutId id="2147483664" r:id="rId4"/>
-    <p:sldLayoutId id="2147483665" r:id="rId5"/>
-    <p:sldLayoutId id="2147483666" r:id="rId6"/>
-    <p:sldLayoutId id="2147483667" r:id="rId7"/>
-    <p:sldLayoutId id="2147483668" r:id="rId8"/>
-    <p:sldLayoutId id="2147483669" r:id="rId9"/>
-    <p:sldLayoutId id="2147483670" r:id="rId10"/>
-    <p:sldLayoutId id="2147483671" r:id="rId11"/>
-    <p:sldLayoutId id="2147483672" r:id="rId12"/>
-    <p:sldLayoutId id="2147483673" r:id="rId13"/>
-    <p:sldLayoutId id="2147483674" r:id="rId14"/>
+    <p:sldLayoutId id="2147483676" r:id="rId1"/>
+    <p:sldLayoutId id="2147483677" r:id="rId2"/>
+    <p:sldLayoutId id="2147483678" r:id="rId3"/>
+    <p:sldLayoutId id="2147483679" r:id="rId4"/>
+    <p:sldLayoutId id="2147483680" r:id="rId5"/>
+    <p:sldLayoutId id="2147483681" r:id="rId6"/>
+    <p:sldLayoutId id="2147483682" r:id="rId7"/>
+    <p:sldLayoutId id="2147483683" r:id="rId8"/>
+    <p:sldLayoutId id="2147483684" r:id="rId9"/>
+    <p:sldLayoutId id="2147483685" r:id="rId10"/>
+    <p:sldLayoutId id="2147483686" r:id="rId11"/>
+    <p:sldLayoutId id="2147483687" r:id="rId12"/>
+    <p:sldLayoutId id="2147483688" r:id="rId13"/>
+    <p:sldLayoutId id="2147483689" r:id="rId14"/>
   </p:sldLayoutIdLst>
   <p:txStyles>
     <p:titleStyle>
@@ -5504,34 +5509,9 @@
           <a:lstStyle/>
           <a:p>
             <a:r>
-              <a:rPr lang="hu-HU" dirty="0"/>
+              <a:rPr lang="hu-HU" b="0" dirty="0"/>
               <a:t>Menüpontok</a:t>
             </a:r>
-          </a:p>
-        </p:txBody>
-      </p:sp>
-      <p:sp>
-        <p:nvSpPr>
-          <p:cNvPr id="3" name="Tartalom helye 2">
-            <a:extLst>
-              <a:ext uri="{FF2B5EF4-FFF2-40B4-BE49-F238E27FC236}">
-                <a16:creationId xmlns:a16="http://schemas.microsoft.com/office/drawing/2014/main" id="{C1843B18-9714-48D9-AB7B-82D89EE37F14}"/>
-              </a:ext>
-            </a:extLst>
-          </p:cNvPr>
-          <p:cNvSpPr>
-            <a:spLocks noGrp="1"/>
-          </p:cNvSpPr>
-          <p:nvPr>
-            <p:ph idx="1"/>
-          </p:nvPr>
-        </p:nvSpPr>
-        <p:spPr/>
-        <p:txBody>
-          <a:bodyPr/>
-          <a:lstStyle/>
-          <a:p>
-            <a:endParaRPr lang="hu-HU" dirty="0"/>
           </a:p>
         </p:txBody>
       </p:sp>
@@ -5579,7 +5559,7 @@
           <a:p>
             <a:pPr algn="ctr"/>
             <a:r>
-              <a:rPr lang="hu-HU" sz="3600" dirty="0"/>
+              <a:rPr lang="hu-HU" sz="3600" b="1" dirty="0"/>
               <a:t>Megye adatai</a:t>
             </a:r>
           </a:p>
@@ -5629,7 +5609,7 @@
           <a:p>
             <a:pPr algn="ctr"/>
             <a:r>
-              <a:rPr lang="hu-HU" sz="3600" dirty="0"/>
+              <a:rPr lang="hu-HU" sz="3600" b="1" dirty="0"/>
               <a:t>Település típusai</a:t>
             </a:r>
           </a:p>
@@ -5637,10 +5617,11 @@
       </p:sp>
       <p:sp>
         <p:nvSpPr>
-          <p:cNvPr id="6" name="Téglalap 5">
+          <p:cNvPr id="9" name="Téglalap 8">
+            <a:hlinkClick r:id="rId4" action="ppaction://hlinksldjump"/>
             <a:extLst>
               <a:ext uri="{FF2B5EF4-FFF2-40B4-BE49-F238E27FC236}">
-                <a16:creationId xmlns:a16="http://schemas.microsoft.com/office/drawing/2014/main" id="{001FCCFF-7649-43F8-8597-4F991AA82251}"/>
+                <a16:creationId xmlns:a16="http://schemas.microsoft.com/office/drawing/2014/main" id="{5D6FD580-A478-4658-8236-4EC94AA4F742}"/>
               </a:ext>
             </a:extLst>
           </p:cNvPr>
@@ -5677,7 +5658,10 @@
           <a:lstStyle/>
           <a:p>
             <a:pPr algn="ctr"/>
-            <a:endParaRPr lang="hu-HU"/>
+            <a:r>
+              <a:rPr lang="hu-HU" sz="3600" b="1" dirty="0"/>
+              <a:t>Kilépés</a:t>
+            </a:r>
           </a:p>
         </p:txBody>
       </p:sp>
@@ -5882,6 +5866,90 @@
                                   </p:childTnLst>
                                 </p:cTn>
                               </p:par>
+                              <p:par>
+                                <p:cTn id="17" presetID="32" presetClass="emph" presetSubtype="0" repeatCount="indefinite" fill="hold" grpId="0" nodeType="withEffect">
+                                  <p:stCondLst>
+                                    <p:cond delay="1000"/>
+                                  </p:stCondLst>
+                                  <p:childTnLst>
+                                    <p:animRot by="120000">
+                                      <p:cBhvr>
+                                        <p:cTn id="18" dur="200" fill="hold">
+                                          <p:stCondLst>
+                                            <p:cond delay="0"/>
+                                          </p:stCondLst>
+                                        </p:cTn>
+                                        <p:tgtEl>
+                                          <p:spTgt spid="9"/>
+                                        </p:tgtEl>
+                                        <p:attrNameLst>
+                                          <p:attrName>r</p:attrName>
+                                        </p:attrNameLst>
+                                      </p:cBhvr>
+                                    </p:animRot>
+                                    <p:animRot by="-240000">
+                                      <p:cBhvr>
+                                        <p:cTn id="19" dur="400" fill="hold">
+                                          <p:stCondLst>
+                                            <p:cond delay="400"/>
+                                          </p:stCondLst>
+                                        </p:cTn>
+                                        <p:tgtEl>
+                                          <p:spTgt spid="9"/>
+                                        </p:tgtEl>
+                                        <p:attrNameLst>
+                                          <p:attrName>r</p:attrName>
+                                        </p:attrNameLst>
+                                      </p:cBhvr>
+                                    </p:animRot>
+                                    <p:animRot by="240000">
+                                      <p:cBhvr>
+                                        <p:cTn id="20" dur="400" fill="hold">
+                                          <p:stCondLst>
+                                            <p:cond delay="800"/>
+                                          </p:stCondLst>
+                                        </p:cTn>
+                                        <p:tgtEl>
+                                          <p:spTgt spid="9"/>
+                                        </p:tgtEl>
+                                        <p:attrNameLst>
+                                          <p:attrName>r</p:attrName>
+                                        </p:attrNameLst>
+                                      </p:cBhvr>
+                                    </p:animRot>
+                                    <p:animRot by="-240000">
+                                      <p:cBhvr>
+                                        <p:cTn id="21" dur="400" fill="hold">
+                                          <p:stCondLst>
+                                            <p:cond delay="1200"/>
+                                          </p:stCondLst>
+                                        </p:cTn>
+                                        <p:tgtEl>
+                                          <p:spTgt spid="9"/>
+                                        </p:tgtEl>
+                                        <p:attrNameLst>
+                                          <p:attrName>r</p:attrName>
+                                        </p:attrNameLst>
+                                      </p:cBhvr>
+                                    </p:animRot>
+                                    <p:animRot by="120000">
+                                      <p:cBhvr>
+                                        <p:cTn id="22" dur="400" fill="hold">
+                                          <p:stCondLst>
+                                            <p:cond delay="1600"/>
+                                          </p:stCondLst>
+                                        </p:cTn>
+                                        <p:tgtEl>
+                                          <p:spTgt spid="9"/>
+                                        </p:tgtEl>
+                                        <p:attrNameLst>
+                                          <p:attrName>r</p:attrName>
+                                        </p:attrNameLst>
+                                      </p:cBhvr>
+                                    </p:animRot>
+                                  </p:childTnLst>
+                                </p:cTn>
+                              </p:par>
                             </p:childTnLst>
                           </p:cTn>
                         </p:par>
@@ -5912,92 +5980,13 @@
     <p:bldLst>
       <p:bldP spid="4" grpId="0" animBg="1"/>
       <p:bldP spid="5" grpId="0" animBg="1"/>
+      <p:bldP spid="9" grpId="0" animBg="1"/>
     </p:bldLst>
   </p:timing>
 </p:sld>
 </file>
 
 <file path=ppt/slides/slide3.xml><?xml version="1.0" encoding="utf-8"?>
-<p:sld xmlns:a="http://schemas.openxmlformats.org/drawingml/2006/main" xmlns:r="http://schemas.openxmlformats.org/officeDocument/2006/relationships" xmlns:p="http://schemas.openxmlformats.org/presentationml/2006/main">
-  <p:cSld>
-    <p:spTree>
-      <p:nvGrpSpPr>
-        <p:cNvPr id="1" name=""/>
-        <p:cNvGrpSpPr/>
-        <p:nvPr/>
-      </p:nvGrpSpPr>
-      <p:grpSpPr>
-        <a:xfrm>
-          <a:off x="0" y="0"/>
-          <a:ext cx="0" cy="0"/>
-          <a:chOff x="0" y="0"/>
-          <a:chExt cx="0" cy="0"/>
-        </a:xfrm>
-      </p:grpSpPr>
-      <p:sp>
-        <p:nvSpPr>
-          <p:cNvPr id="2" name="Cím 1">
-            <a:extLst>
-              <a:ext uri="{FF2B5EF4-FFF2-40B4-BE49-F238E27FC236}">
-                <a16:creationId xmlns:a16="http://schemas.microsoft.com/office/drawing/2014/main" id="{FA72CCF2-659B-4869-B53B-A182EF3FFDCC}"/>
-              </a:ext>
-            </a:extLst>
-          </p:cNvPr>
-          <p:cNvSpPr>
-            <a:spLocks noGrp="1"/>
-          </p:cNvSpPr>
-          <p:nvPr>
-            <p:ph type="title"/>
-          </p:nvPr>
-        </p:nvSpPr>
-        <p:spPr/>
-        <p:txBody>
-          <a:bodyPr/>
-          <a:lstStyle/>
-          <a:p>
-            <a:endParaRPr lang="hu-HU"/>
-          </a:p>
-        </p:txBody>
-      </p:sp>
-      <p:sp>
-        <p:nvSpPr>
-          <p:cNvPr id="3" name="Tartalom helye 2">
-            <a:extLst>
-              <a:ext uri="{FF2B5EF4-FFF2-40B4-BE49-F238E27FC236}">
-                <a16:creationId xmlns:a16="http://schemas.microsoft.com/office/drawing/2014/main" id="{2307741A-7425-40D5-A271-BF2C1A9A2457}"/>
-              </a:ext>
-            </a:extLst>
-          </p:cNvPr>
-          <p:cNvSpPr>
-            <a:spLocks noGrp="1"/>
-          </p:cNvSpPr>
-          <p:nvPr>
-            <p:ph idx="1"/>
-          </p:nvPr>
-        </p:nvSpPr>
-        <p:spPr/>
-        <p:txBody>
-          <a:bodyPr/>
-          <a:lstStyle/>
-          <a:p>
-            <a:endParaRPr lang="hu-HU"/>
-          </a:p>
-        </p:txBody>
-      </p:sp>
-    </p:spTree>
-    <p:extLst>
-      <p:ext uri="{BB962C8B-B14F-4D97-AF65-F5344CB8AC3E}">
-        <p14:creationId xmlns:p14="http://schemas.microsoft.com/office/powerpoint/2010/main" val="423501545"/>
-      </p:ext>
-    </p:extLst>
-  </p:cSld>
-  <p:clrMapOvr>
-    <a:masterClrMapping/>
-  </p:clrMapOvr>
-</p:sld>
-</file>
-
-<file path=ppt/slides/slide4.xml><?xml version="1.0" encoding="utf-8"?>
 <p:sld xmlns:a="http://schemas.openxmlformats.org/drawingml/2006/main" xmlns:r="http://schemas.openxmlformats.org/officeDocument/2006/relationships" xmlns:p="http://schemas.openxmlformats.org/presentationml/2006/main">
   <p:cSld>
     <p:spTree>
@@ -6083,10 +6072,10 @@
       </p:pic>
       <p:sp>
         <p:nvSpPr>
-          <p:cNvPr id="6" name="Szövegdoboz 5">
+          <p:cNvPr id="3" name="Szövegdoboz 2">
             <a:extLst>
               <a:ext uri="{FF2B5EF4-FFF2-40B4-BE49-F238E27FC236}">
-                <a16:creationId xmlns:a16="http://schemas.microsoft.com/office/drawing/2014/main" id="{2A446905-2E13-4EA8-89F7-C211A4856F6F}"/>
+                <a16:creationId xmlns:a16="http://schemas.microsoft.com/office/drawing/2014/main" id="{BFDD2F34-73C4-4E61-AF70-D0E1BD174F29}"/>
               </a:ext>
             </a:extLst>
           </p:cNvPr>
@@ -6095,8 +6084,8 @@
         </p:nvSpPr>
         <p:spPr>
           <a:xfrm>
-            <a:off x="1156447" y="3003176"/>
-            <a:ext cx="10094259" cy="369332"/>
+            <a:off x="582707" y="2321859"/>
+            <a:ext cx="4240305" cy="3046988"/>
           </a:xfrm>
           <a:prstGeom prst="rect">
             <a:avLst/>
@@ -6109,11 +6098,89 @@
           </a:bodyPr>
           <a:lstStyle/>
           <a:p>
-            <a:r>
-              <a:rPr lang="hu-HU" dirty="0" err="1"/>
-              <a:t>hj</a:t>
-            </a:r>
-            <a:endParaRPr lang="hu-HU" dirty="0"/>
+            <a:pPr marL="342900" indent="-342900">
+              <a:buFont typeface="Arial" panose="020B0604020202020204" pitchFamily="34" charset="0"/>
+              <a:buChar char="•"/>
+            </a:pPr>
+            <a:r>
+              <a:rPr lang="hu-HU" sz="2400" dirty="0"/>
+              <a:t>A </a:t>
+            </a:r>
+            <a:r>
+              <a:rPr lang="hu-HU" sz="2400" b="1" dirty="0"/>
+              <a:t>Megye adatai </a:t>
+            </a:r>
+            <a:r>
+              <a:rPr lang="hu-HU" sz="2400" dirty="0"/>
+              <a:t>opcióban lehetősége van a felhasználónak beírnia egy adott megye nevének rövidítését. </a:t>
+            </a:r>
+          </a:p>
+          <a:p>
+            <a:pPr marL="342900" indent="-342900">
+              <a:buFont typeface="Arial" panose="020B0604020202020204" pitchFamily="34" charset="0"/>
+              <a:buChar char="•"/>
+            </a:pPr>
+            <a:endParaRPr lang="hu-HU" sz="2400" dirty="0"/>
+          </a:p>
+          <a:p>
+            <a:pPr marL="342900" indent="-342900">
+              <a:buFont typeface="Arial" panose="020B0604020202020204" pitchFamily="34" charset="0"/>
+              <a:buChar char="•"/>
+            </a:pPr>
+            <a:r>
+              <a:rPr lang="hu-HU" sz="2400" dirty="0"/>
+              <a:t>Ezt követően a program kiírja a megye adatait.</a:t>
+            </a:r>
+          </a:p>
+        </p:txBody>
+      </p:sp>
+      <p:sp>
+        <p:nvSpPr>
+          <p:cNvPr id="7" name="Téglalap 6">
+            <a:hlinkClick r:id="rId5" action="ppaction://hlinksldjump"/>
+            <a:extLst>
+              <a:ext uri="{FF2B5EF4-FFF2-40B4-BE49-F238E27FC236}">
+                <a16:creationId xmlns:a16="http://schemas.microsoft.com/office/drawing/2014/main" id="{A44EB67A-C8FF-4294-BB0C-3B0D2982315F}"/>
+              </a:ext>
+            </a:extLst>
+          </p:cNvPr>
+          <p:cNvSpPr/>
+          <p:nvPr/>
+        </p:nvSpPr>
+        <p:spPr>
+          <a:xfrm>
+            <a:off x="9960534" y="5169549"/>
+            <a:ext cx="2228288" cy="1688451"/>
+          </a:xfrm>
+          <a:prstGeom prst="rect">
+            <a:avLst/>
+          </a:prstGeom>
+        </p:spPr>
+        <p:style>
+          <a:lnRef idx="2">
+            <a:schemeClr val="accent1">
+              <a:shade val="50000"/>
+            </a:schemeClr>
+          </a:lnRef>
+          <a:fillRef idx="1">
+            <a:schemeClr val="accent1"/>
+          </a:fillRef>
+          <a:effectRef idx="0">
+            <a:schemeClr val="accent1"/>
+          </a:effectRef>
+          <a:fontRef idx="minor">
+            <a:schemeClr val="lt1"/>
+          </a:fontRef>
+        </p:style>
+        <p:txBody>
+          <a:bodyPr rtlCol="0" anchor="ctr"/>
+          <a:lstStyle/>
+          <a:p>
+            <a:pPr algn="ctr"/>
+            <a:r>
+              <a:rPr lang="hu-HU" sz="2800" b="1" dirty="0"/>
+              <a:t>Kérem a megye rövidítését: </a:t>
+            </a:r>
           </a:p>
         </p:txBody>
       </p:sp>
@@ -6254,6 +6321,378 @@
                                   </p:childTnLst>
                                 </p:cTn>
                               </p:par>
+                              <p:par>
+                                <p:cTn id="11" presetID="32" presetClass="emph" presetSubtype="0" repeatCount="indefinite" fill="hold" grpId="0" nodeType="withEffect">
+                                  <p:stCondLst>
+                                    <p:cond delay="1000"/>
+                                  </p:stCondLst>
+                                  <p:childTnLst>
+                                    <p:animRot by="120000">
+                                      <p:cBhvr>
+                                        <p:cTn id="12" dur="200" fill="hold">
+                                          <p:stCondLst>
+                                            <p:cond delay="0"/>
+                                          </p:stCondLst>
+                                        </p:cTn>
+                                        <p:tgtEl>
+                                          <p:spTgt spid="7"/>
+                                        </p:tgtEl>
+                                        <p:attrNameLst>
+                                          <p:attrName>r</p:attrName>
+                                        </p:attrNameLst>
+                                      </p:cBhvr>
+                                    </p:animRot>
+                                    <p:animRot by="-240000">
+                                      <p:cBhvr>
+                                        <p:cTn id="13" dur="400" fill="hold">
+                                          <p:stCondLst>
+                                            <p:cond delay="400"/>
+                                          </p:stCondLst>
+                                        </p:cTn>
+                                        <p:tgtEl>
+                                          <p:spTgt spid="7"/>
+                                        </p:tgtEl>
+                                        <p:attrNameLst>
+                                          <p:attrName>r</p:attrName>
+                                        </p:attrNameLst>
+                                      </p:cBhvr>
+                                    </p:animRot>
+                                    <p:animRot by="240000">
+                                      <p:cBhvr>
+                                        <p:cTn id="14" dur="400" fill="hold">
+                                          <p:stCondLst>
+                                            <p:cond delay="800"/>
+                                          </p:stCondLst>
+                                        </p:cTn>
+                                        <p:tgtEl>
+                                          <p:spTgt spid="7"/>
+                                        </p:tgtEl>
+                                        <p:attrNameLst>
+                                          <p:attrName>r</p:attrName>
+                                        </p:attrNameLst>
+                                      </p:cBhvr>
+                                    </p:animRot>
+                                    <p:animRot by="-240000">
+                                      <p:cBhvr>
+                                        <p:cTn id="15" dur="400" fill="hold">
+                                          <p:stCondLst>
+                                            <p:cond delay="1200"/>
+                                          </p:stCondLst>
+                                        </p:cTn>
+                                        <p:tgtEl>
+                                          <p:spTgt spid="7"/>
+                                        </p:tgtEl>
+                                        <p:attrNameLst>
+                                          <p:attrName>r</p:attrName>
+                                        </p:attrNameLst>
+                                      </p:cBhvr>
+                                    </p:animRot>
+                                    <p:animRot by="120000">
+                                      <p:cBhvr>
+                                        <p:cTn id="16" dur="400" fill="hold">
+                                          <p:stCondLst>
+                                            <p:cond delay="1600"/>
+                                          </p:stCondLst>
+                                        </p:cTn>
+                                        <p:tgtEl>
+                                          <p:spTgt spid="7"/>
+                                        </p:tgtEl>
+                                        <p:attrNameLst>
+                                          <p:attrName>r</p:attrName>
+                                        </p:attrNameLst>
+                                      </p:cBhvr>
+                                    </p:animRot>
+                                  </p:childTnLst>
+                                </p:cTn>
+                              </p:par>
+                            </p:childTnLst>
+                          </p:cTn>
+                        </p:par>
+                      </p:childTnLst>
+                    </p:cTn>
+                  </p:par>
+                </p:childTnLst>
+              </p:cTn>
+              <p:prevCondLst>
+                <p:cond evt="onPrev" delay="0">
+                  <p:tgtEl>
+                    <p:sldTgt/>
+                  </p:tgtEl>
+                </p:cond>
+              </p:prevCondLst>
+              <p:nextCondLst>
+                <p:cond evt="onNext" delay="0">
+                  <p:tgtEl>
+                    <p:sldTgt/>
+                  </p:tgtEl>
+                </p:cond>
+              </p:nextCondLst>
+            </p:seq>
+          </p:childTnLst>
+        </p:cTn>
+      </p:par>
+    </p:tnLst>
+    <p:bldLst>
+      <p:bldP spid="7" grpId="0" animBg="1"/>
+    </p:bldLst>
+  </p:timing>
+</p:sld>
+</file>
+
+<file path=ppt/slides/slide4.xml><?xml version="1.0" encoding="utf-8"?>
+<p:sld xmlns:a="http://schemas.openxmlformats.org/drawingml/2006/main" xmlns:r="http://schemas.openxmlformats.org/officeDocument/2006/relationships" xmlns:p="http://schemas.openxmlformats.org/presentationml/2006/main">
+  <p:cSld>
+    <p:spTree>
+      <p:nvGrpSpPr>
+        <p:cNvPr id="1" name=""/>
+        <p:cNvGrpSpPr/>
+        <p:nvPr/>
+      </p:nvGrpSpPr>
+      <p:grpSpPr>
+        <a:xfrm>
+          <a:off x="0" y="0"/>
+          <a:ext cx="0" cy="0"/>
+          <a:chOff x="0" y="0"/>
+          <a:chExt cx="0" cy="0"/>
+        </a:xfrm>
+      </p:grpSpPr>
+      <p:sp>
+        <p:nvSpPr>
+          <p:cNvPr id="2" name="Cím 1">
+            <a:extLst>
+              <a:ext uri="{FF2B5EF4-FFF2-40B4-BE49-F238E27FC236}">
+                <a16:creationId xmlns:a16="http://schemas.microsoft.com/office/drawing/2014/main" id="{6C2E346C-5E10-49FE-BDFC-E1EF1400BE90}"/>
+              </a:ext>
+            </a:extLst>
+          </p:cNvPr>
+          <p:cNvSpPr>
+            <a:spLocks noGrp="1"/>
+          </p:cNvSpPr>
+          <p:nvPr>
+            <p:ph type="title"/>
+          </p:nvPr>
+        </p:nvSpPr>
+        <p:spPr/>
+        <p:txBody>
+          <a:bodyPr/>
+          <a:lstStyle/>
+          <a:p>
+            <a:r>
+              <a:rPr lang="hu-HU" dirty="0"/>
+              <a:t>Település típusai</a:t>
+            </a:r>
+          </a:p>
+        </p:txBody>
+      </p:sp>
+      <p:sp>
+        <p:nvSpPr>
+          <p:cNvPr id="3" name="Tartalom helye 2">
+            <a:extLst>
+              <a:ext uri="{FF2B5EF4-FFF2-40B4-BE49-F238E27FC236}">
+                <a16:creationId xmlns:a16="http://schemas.microsoft.com/office/drawing/2014/main" id="{AA1ED55D-6B4B-41E7-BC75-1713822ED599}"/>
+              </a:ext>
+            </a:extLst>
+          </p:cNvPr>
+          <p:cNvSpPr>
+            <a:spLocks noGrp="1"/>
+          </p:cNvSpPr>
+          <p:nvPr>
+            <p:ph idx="1"/>
+          </p:nvPr>
+        </p:nvSpPr>
+        <p:spPr/>
+        <p:txBody>
+          <a:bodyPr/>
+          <a:lstStyle/>
+          <a:p>
+            <a:endParaRPr lang="hu-HU"/>
+          </a:p>
+        </p:txBody>
+      </p:sp>
+      <p:pic>
+        <p:nvPicPr>
+          <p:cNvPr id="4" name="Tartalom helye 4" descr="Nyíl: forgatás balra egyszínű kitöltéssel">
+            <a:hlinkClick r:id="rId2" action="ppaction://hlinksldjump"/>
+            <a:extLst>
+              <a:ext uri="{FF2B5EF4-FFF2-40B4-BE49-F238E27FC236}">
+                <a16:creationId xmlns:a16="http://schemas.microsoft.com/office/drawing/2014/main" id="{D8E1433B-4373-4A58-B033-DFA1906CD7F2}"/>
+              </a:ext>
+            </a:extLst>
+          </p:cNvPr>
+          <p:cNvPicPr>
+            <a:picLocks noChangeAspect="1"/>
+          </p:cNvPicPr>
+          <p:nvPr/>
+        </p:nvPicPr>
+        <p:blipFill>
+          <a:blip r:embed="rId3">
+            <a:extLst>
+              <a:ext uri="{28A0092B-C50C-407E-A947-70E740481C1C}">
+                <a14:useLocalDpi xmlns:a14="http://schemas.microsoft.com/office/drawing/2010/main" val="0"/>
+              </a:ext>
+              <a:ext uri="{96DAC541-7B7A-43D3-8B79-37D633B846F1}">
+                <asvg:svgBlip xmlns:asvg="http://schemas.microsoft.com/office/drawing/2016/SVG/main" r:embed="rId4"/>
+              </a:ext>
+            </a:extLst>
+          </a:blip>
+          <a:stretch>
+            <a:fillRect/>
+          </a:stretch>
+        </p:blipFill>
+        <p:spPr>
+          <a:xfrm>
+            <a:off x="10584139" y="321224"/>
+            <a:ext cx="1222378" cy="1222378"/>
+          </a:xfrm>
+          <a:prstGeom prst="rect">
+            <a:avLst/>
+          </a:prstGeom>
+          <a:effectLst>
+            <a:outerShdw blurRad="50800" dir="14400000">
+              <a:srgbClr val="000000">
+                <a:alpha val="40000"/>
+              </a:srgbClr>
+            </a:outerShdw>
+          </a:effectLst>
+        </p:spPr>
+      </p:pic>
+    </p:spTree>
+    <p:extLst>
+      <p:ext uri="{BB962C8B-B14F-4D97-AF65-F5344CB8AC3E}">
+        <p14:creationId xmlns:p14="http://schemas.microsoft.com/office/powerpoint/2010/main" val="2179592640"/>
+      </p:ext>
+    </p:extLst>
+  </p:cSld>
+  <p:clrMapOvr>
+    <a:masterClrMapping/>
+  </p:clrMapOvr>
+  <p:timing>
+    <p:tnLst>
+      <p:par>
+        <p:cTn id="1" dur="indefinite" restart="never" nodeType="tmRoot">
+          <p:childTnLst>
+            <p:seq concurrent="1" nextAc="seek">
+              <p:cTn id="2" dur="indefinite" nodeType="mainSeq">
+                <p:childTnLst>
+                  <p:par>
+                    <p:cTn id="3" fill="hold">
+                      <p:stCondLst>
+                        <p:cond delay="indefinite"/>
+                        <p:cond evt="onBegin" delay="0">
+                          <p:tn val="2"/>
+                        </p:cond>
+                      </p:stCondLst>
+                      <p:childTnLst>
+                        <p:par>
+                          <p:cTn id="4" fill="hold">
+                            <p:stCondLst>
+                              <p:cond delay="0"/>
+                            </p:stCondLst>
+                            <p:childTnLst>
+                              <p:par>
+                                <p:cTn id="5" presetID="31" presetClass="entr" presetSubtype="0" fill="hold" nodeType="withEffect">
+                                  <p:stCondLst>
+                                    <p:cond delay="0"/>
+                                  </p:stCondLst>
+                                  <p:childTnLst>
+                                    <p:set>
+                                      <p:cBhvr>
+                                        <p:cTn id="6" dur="1" fill="hold">
+                                          <p:stCondLst>
+                                            <p:cond delay="0"/>
+                                          </p:stCondLst>
+                                        </p:cTn>
+                                        <p:tgtEl>
+                                          <p:spTgt spid="4"/>
+                                        </p:tgtEl>
+                                        <p:attrNameLst>
+                                          <p:attrName>style.visibility</p:attrName>
+                                        </p:attrNameLst>
+                                      </p:cBhvr>
+                                      <p:to>
+                                        <p:strVal val="visible"/>
+                                      </p:to>
+                                    </p:set>
+                                    <p:anim calcmode="lin" valueType="num">
+                                      <p:cBhvr>
+                                        <p:cTn id="7" dur="1000" fill="hold"/>
+                                        <p:tgtEl>
+                                          <p:spTgt spid="4"/>
+                                        </p:tgtEl>
+                                        <p:attrNameLst>
+                                          <p:attrName>ppt_w</p:attrName>
+                                        </p:attrNameLst>
+                                      </p:cBhvr>
+                                      <p:tavLst>
+                                        <p:tav tm="0">
+                                          <p:val>
+                                            <p:fltVal val="0"/>
+                                          </p:val>
+                                        </p:tav>
+                                        <p:tav tm="100000">
+                                          <p:val>
+                                            <p:strVal val="#ppt_w"/>
+                                          </p:val>
+                                        </p:tav>
+                                      </p:tavLst>
+                                    </p:anim>
+                                    <p:anim calcmode="lin" valueType="num">
+                                      <p:cBhvr>
+                                        <p:cTn id="8" dur="1000" fill="hold"/>
+                                        <p:tgtEl>
+                                          <p:spTgt spid="4"/>
+                                        </p:tgtEl>
+                                        <p:attrNameLst>
+                                          <p:attrName>ppt_h</p:attrName>
+                                        </p:attrNameLst>
+                                      </p:cBhvr>
+                                      <p:tavLst>
+                                        <p:tav tm="0">
+                                          <p:val>
+                                            <p:fltVal val="0"/>
+                                          </p:val>
+                                        </p:tav>
+                                        <p:tav tm="100000">
+                                          <p:val>
+                                            <p:strVal val="#ppt_h"/>
+                                          </p:val>
+                                        </p:tav>
+                                      </p:tavLst>
+                                    </p:anim>
+                                    <p:anim calcmode="lin" valueType="num">
+                                      <p:cBhvr>
+                                        <p:cTn id="9" dur="1000" fill="hold"/>
+                                        <p:tgtEl>
+                                          <p:spTgt spid="4"/>
+                                        </p:tgtEl>
+                                        <p:attrNameLst>
+                                          <p:attrName>style.rotation</p:attrName>
+                                        </p:attrNameLst>
+                                      </p:cBhvr>
+                                      <p:tavLst>
+                                        <p:tav tm="0">
+                                          <p:val>
+                                            <p:fltVal val="90"/>
+                                          </p:val>
+                                        </p:tav>
+                                        <p:tav tm="100000">
+                                          <p:val>
+                                            <p:fltVal val="0"/>
+                                          </p:val>
+                                        </p:tav>
+                                      </p:tavLst>
+                                    </p:anim>
+                                    <p:animEffect transition="in" filter="fade">
+                                      <p:cBhvr>
+                                        <p:cTn id="10" dur="1000"/>
+                                        <p:tgtEl>
+                                          <p:spTgt spid="4"/>
+                                        </p:tgtEl>
+                                      </p:cBhvr>
+                                    </p:animEffect>
+                                  </p:childTnLst>
+                                </p:cTn>
+                              </p:par>
                             </p:childTnLst>
                           </p:cTn>
                         </p:par>
@@ -6304,61 +6743,211 @@
       </p:grpSpPr>
       <p:sp>
         <p:nvSpPr>
-          <p:cNvPr id="2" name="Cím 1">
+          <p:cNvPr id="8" name="Téglalap 7">
             <a:extLst>
               <a:ext uri="{FF2B5EF4-FFF2-40B4-BE49-F238E27FC236}">
-                <a16:creationId xmlns:a16="http://schemas.microsoft.com/office/drawing/2014/main" id="{6C2E346C-5E10-49FE-BDFC-E1EF1400BE90}"/>
+                <a16:creationId xmlns:a16="http://schemas.microsoft.com/office/drawing/2014/main" id="{8E0E6266-FAF8-4435-9F1C-FB95CE8E8A70}"/>
               </a:ext>
             </a:extLst>
           </p:cNvPr>
-          <p:cNvSpPr>
-            <a:spLocks noGrp="1"/>
-          </p:cNvSpPr>
-          <p:nvPr>
-            <p:ph type="title"/>
-          </p:nvPr>
-        </p:nvSpPr>
-        <p:spPr/>
-        <p:txBody>
-          <a:bodyPr/>
+          <p:cNvSpPr/>
+          <p:nvPr/>
+        </p:nvSpPr>
+        <p:spPr>
+          <a:xfrm>
+            <a:off x="394445" y="2859740"/>
+            <a:ext cx="5701555" cy="788894"/>
+          </a:xfrm>
+          <a:prstGeom prst="rect">
+            <a:avLst/>
+          </a:prstGeom>
+        </p:spPr>
+        <p:style>
+          <a:lnRef idx="2">
+            <a:schemeClr val="accent1">
+              <a:shade val="50000"/>
+            </a:schemeClr>
+          </a:lnRef>
+          <a:fillRef idx="1">
+            <a:schemeClr val="accent1"/>
+          </a:fillRef>
+          <a:effectRef idx="0">
+            <a:schemeClr val="accent1"/>
+          </a:effectRef>
+          <a:fontRef idx="minor">
+            <a:schemeClr val="lt1"/>
+          </a:fontRef>
+        </p:style>
+        <p:txBody>
+          <a:bodyPr rtlCol="0" anchor="ctr"/>
           <a:lstStyle/>
           <a:p>
             <a:r>
-              <a:rPr lang="hu-HU" dirty="0"/>
-              <a:t>Település típusai</a:t>
-            </a:r>
-          </a:p>
-        </p:txBody>
-      </p:sp>
-      <p:sp>
-        <p:nvSpPr>
-          <p:cNvPr id="3" name="Tartalom helye 2">
+              <a:rPr lang="hu-HU" sz="3600" dirty="0"/>
+              <a:t>Városok összes lakosa:</a:t>
+            </a:r>
+          </a:p>
+        </p:txBody>
+      </p:sp>
+      <p:sp>
+        <p:nvSpPr>
+          <p:cNvPr id="7" name="Téglalap 6">
             <a:extLst>
               <a:ext uri="{FF2B5EF4-FFF2-40B4-BE49-F238E27FC236}">
-                <a16:creationId xmlns:a16="http://schemas.microsoft.com/office/drawing/2014/main" id="{AA1ED55D-6B4B-41E7-BC75-1713822ED599}"/>
+                <a16:creationId xmlns:a16="http://schemas.microsoft.com/office/drawing/2014/main" id="{B6E1A051-498B-4FA9-8D78-1E160C353BD2}"/>
               </a:ext>
             </a:extLst>
           </p:cNvPr>
-          <p:cNvSpPr>
-            <a:spLocks noGrp="1"/>
-          </p:cNvSpPr>
-          <p:nvPr>
-            <p:ph idx="1"/>
-          </p:nvPr>
-        </p:nvSpPr>
-        <p:spPr/>
-        <p:txBody>
-          <a:bodyPr/>
+          <p:cNvSpPr/>
+          <p:nvPr/>
+        </p:nvSpPr>
+        <p:spPr>
+          <a:xfrm>
+            <a:off x="394445" y="1748117"/>
+            <a:ext cx="5701555" cy="788894"/>
+          </a:xfrm>
+          <a:prstGeom prst="rect">
+            <a:avLst/>
+          </a:prstGeom>
+        </p:spPr>
+        <p:style>
+          <a:lnRef idx="2">
+            <a:schemeClr val="accent1">
+              <a:shade val="50000"/>
+            </a:schemeClr>
+          </a:lnRef>
+          <a:fillRef idx="1">
+            <a:schemeClr val="accent1"/>
+          </a:fillRef>
+          <a:effectRef idx="0">
+            <a:schemeClr val="accent1"/>
+          </a:effectRef>
+          <a:fontRef idx="minor">
+            <a:schemeClr val="lt1"/>
+          </a:fontRef>
+        </p:style>
+        <p:txBody>
+          <a:bodyPr rtlCol="0" anchor="ctr"/>
           <a:lstStyle/>
           <a:p>
-            <a:endParaRPr lang="hu-HU"/>
+            <a:r>
+              <a:rPr lang="hu-HU" sz="3600" dirty="0"/>
+              <a:t>Összes lakos:</a:t>
+            </a:r>
+          </a:p>
+        </p:txBody>
+      </p:sp>
+      <p:sp>
+        <p:nvSpPr>
+          <p:cNvPr id="6" name="Téglalap 5">
+            <a:extLst>
+              <a:ext uri="{FF2B5EF4-FFF2-40B4-BE49-F238E27FC236}">
+                <a16:creationId xmlns:a16="http://schemas.microsoft.com/office/drawing/2014/main" id="{FF57D2E2-7B8E-4C9B-B789-1CAC9F0936B1}"/>
+              </a:ext>
+            </a:extLst>
+          </p:cNvPr>
+          <p:cNvSpPr/>
+          <p:nvPr/>
+        </p:nvSpPr>
+        <p:spPr>
+          <a:xfrm>
+            <a:off x="394445" y="636494"/>
+            <a:ext cx="5701555" cy="788894"/>
+          </a:xfrm>
+          <a:prstGeom prst="rect">
+            <a:avLst/>
+          </a:prstGeom>
+        </p:spPr>
+        <p:style>
+          <a:lnRef idx="2">
+            <a:schemeClr val="accent1">
+              <a:shade val="50000"/>
+            </a:schemeClr>
+          </a:lnRef>
+          <a:fillRef idx="1">
+            <a:schemeClr val="accent1"/>
+          </a:fillRef>
+          <a:effectRef idx="0">
+            <a:schemeClr val="accent1"/>
+          </a:effectRef>
+          <a:fontRef idx="minor">
+            <a:schemeClr val="lt1"/>
+          </a:fontRef>
+        </p:style>
+        <p:txBody>
+          <a:bodyPr rtlCol="0" anchor="ctr"/>
+          <a:lstStyle/>
+          <a:p>
+            <a:r>
+              <a:rPr lang="hu-HU" sz="3600" dirty="0"/>
+              <a:t>Települések száma:</a:t>
+            </a:r>
+          </a:p>
+        </p:txBody>
+      </p:sp>
+      <p:sp>
+        <p:nvSpPr>
+          <p:cNvPr id="11" name="Szövegdoboz 10">
+            <a:extLst>
+              <a:ext uri="{FF2B5EF4-FFF2-40B4-BE49-F238E27FC236}">
+                <a16:creationId xmlns:a16="http://schemas.microsoft.com/office/drawing/2014/main" id="{D53D10D2-F258-4D63-8487-A03A3C0B73C7}"/>
+              </a:ext>
+            </a:extLst>
+          </p:cNvPr>
+          <p:cNvSpPr txBox="1"/>
+          <p:nvPr/>
+        </p:nvSpPr>
+        <p:spPr>
+          <a:xfrm>
+            <a:off x="546847" y="4186518"/>
+            <a:ext cx="5172635" cy="2308324"/>
+          </a:xfrm>
+          <a:prstGeom prst="rect">
+            <a:avLst/>
+          </a:prstGeom>
+          <a:noFill/>
+        </p:spPr>
+        <p:txBody>
+          <a:bodyPr wrap="square" rtlCol="0">
+            <a:spAutoFit/>
+          </a:bodyPr>
+          <a:lstStyle/>
+          <a:p>
+            <a:pPr marL="342900" indent="-342900">
+              <a:buFont typeface="Arial" panose="020B0604020202020204" pitchFamily="34" charset="0"/>
+              <a:buChar char="•"/>
+            </a:pPr>
+            <a:r>
+              <a:rPr lang="hu-HU" sz="2400" dirty="0"/>
+              <a:t>A program a mintának és a megfelelően megfelelőén kiírja az adott megye </a:t>
+            </a:r>
+            <a:r>
+              <a:rPr lang="hu-HU" sz="2400" b="1" dirty="0"/>
+              <a:t>Településének a számát</a:t>
+            </a:r>
+            <a:r>
+              <a:rPr lang="hu-HU" sz="2400" dirty="0"/>
+              <a:t>, az </a:t>
+            </a:r>
+            <a:r>
+              <a:rPr lang="hu-HU" sz="2400" b="1" dirty="0"/>
+              <a:t>Összes lakost</a:t>
+            </a:r>
+            <a:r>
+              <a:rPr lang="hu-HU" sz="2400" dirty="0"/>
+              <a:t>, és a </a:t>
+            </a:r>
+            <a:r>
+              <a:rPr lang="hu-HU" sz="2400" b="1" dirty="0"/>
+              <a:t>Városok összes lakosának számát</a:t>
+            </a:r>
           </a:p>
         </p:txBody>
       </p:sp>
     </p:spTree>
     <p:extLst>
       <p:ext uri="{BB962C8B-B14F-4D97-AF65-F5344CB8AC3E}">
-        <p14:creationId xmlns:p14="http://schemas.microsoft.com/office/powerpoint/2010/main" val="2179592640"/>
+        <p14:creationId xmlns:p14="http://schemas.microsoft.com/office/powerpoint/2010/main" val="4000070056"/>
       </p:ext>
     </p:extLst>
   </p:cSld>
@@ -6385,22 +6974,22 @@
         <a:srgbClr val="636363"/>
       </a:lt2>
       <a:accent1>
-        <a:srgbClr val="00C6BB"/>
+        <a:srgbClr val="8664B0"/>
       </a:accent1>
       <a:accent2>
-        <a:srgbClr val="6FEBA0"/>
+        <a:srgbClr val="D75BCD"/>
       </a:accent2>
       <a:accent3>
-        <a:srgbClr val="B6DF5E"/>
+        <a:srgbClr val="E54D86"/>
       </a:accent3>
       <a:accent4>
-        <a:srgbClr val="EFB251"/>
+        <a:srgbClr val="DE4547"/>
       </a:accent4>
       <a:accent5>
-        <a:srgbClr val="EF755F"/>
+        <a:srgbClr val="F16E40"/>
       </a:accent5>
       <a:accent6>
-        <a:srgbClr val="ED515C"/>
+        <a:srgbClr val="EB9C5A"/>
       </a:accent6>
       <a:hlink>
         <a:srgbClr val="8F8F8F"/>
@@ -6599,7 +7188,7 @@
   <a:extraClrSchemeLst/>
   <a:extLst>
     <a:ext uri="{05A4C25C-085E-4340-85A3-A5531E510DB2}">
-      <thm15:themeFamily xmlns:thm15="http://schemas.microsoft.com/office/thememl/2012/main" name="Quotable" id="{39EC5628-30ED-4578-ACD8-9820EDB8E15A}" vid="{6F3559E9-1A4C-49D8-94D4-F41003531C49}"/>
+      <thm15:themeFamily xmlns:thm15="http://schemas.microsoft.com/office/thememl/2012/main" name="Quotable" id="{39EC5628-30ED-4578-ACD8-9820EDB8E15A}" vid="{7AF46513-5B0D-4B03-9323-32F3F0BFC9D6}"/>
     </a:ext>
   </a:extLst>
 </a:theme>
